--- a/youtube-slides/からだの不思議10_脳と痛み/脳と痛み_スライド.pptx
+++ b/youtube-slides/からだの不思議10_脳と痛み/脳と痛み_スライド.pptx
@@ -3189,7 +3189,7 @@
         <p:spPr>
           <a:xfrm>
             <a:off x="182880" y="1005840"/>
-            <a:ext cx="2103120" cy="457200"/>
+            <a:ext cx="1645920" cy="457200"/>
           </a:xfrm>
           <a:prstGeom prst="rect">
             <a:avLst/>
@@ -3208,8 +3208,8 @@
         </p:nvSpPr>
         <p:spPr>
           <a:xfrm>
-            <a:off x="2286000" y="1005840"/>
-            <a:ext cx="4572000" cy="457200"/>
+            <a:off x="1828800" y="1005840"/>
+            <a:ext cx="5029200" cy="457200"/>
           </a:xfrm>
           <a:prstGeom prst="rect">
             <a:avLst/>
@@ -3249,7 +3249,7 @@
         <p:spPr>
           <a:xfrm>
             <a:off x="182880" y="1005840"/>
-            <a:ext cx="2103120" cy="457200"/>
+            <a:ext cx="1645920" cy="457200"/>
           </a:xfrm>
           <a:prstGeom prst="rect">
             <a:avLst/>
@@ -3287,8 +3287,8 @@
         </p:nvSpPr>
         <p:spPr>
           <a:xfrm>
-            <a:off x="2286000" y="1005840"/>
-            <a:ext cx="4572000" cy="457200"/>
+            <a:off x="1828800" y="1005840"/>
+            <a:ext cx="5029200" cy="457200"/>
           </a:xfrm>
           <a:prstGeom prst="rect">
             <a:avLst/>
@@ -3386,7 +3386,7 @@
         <p:spPr>
           <a:xfrm>
             <a:off x="182880" y="1508760"/>
-            <a:ext cx="2103120" cy="877824"/>
+            <a:ext cx="1645920" cy="877824"/>
           </a:xfrm>
           <a:prstGeom prst="rect">
             <a:avLst/>
@@ -3405,7 +3405,7 @@
               <a:buNone/>
             </a:pPr>
             <a:r>
-              <a:rPr lang="en-US" sz="1300" b="1" dirty="0">
+              <a:rPr lang="en-US" sz="1200" b="1" dirty="0">
                 <a:solidFill>
                   <a:srgbClr val="2C5AA0"/>
                 </a:solidFill>
@@ -3415,7 +3415,7 @@
               </a:rPr>
               <a:t>硬膜</a:t>
             </a:r>
-            <a:endParaRPr lang="en-US" sz="1300" dirty="0"/>
+            <a:endParaRPr lang="en-US" sz="1200" dirty="0"/>
           </a:p>
           <a:p>
             <a:pPr algn="ctr" indent="0" marL="0">
@@ -3425,7 +3425,7 @@
               <a:buNone/>
             </a:pPr>
             <a:r>
-              <a:rPr lang="en-US" sz="1300" b="1" dirty="0">
+              <a:rPr lang="en-US" sz="1200" b="1" dirty="0">
                 <a:solidFill>
                   <a:srgbClr val="2C5AA0"/>
                 </a:solidFill>
@@ -3435,7 +3435,7 @@
               </a:rPr>
               <a:t>(dura mater)</a:t>
             </a:r>
-            <a:endParaRPr lang="en-US" sz="1300" dirty="0"/>
+            <a:endParaRPr lang="en-US" sz="1200" dirty="0"/>
           </a:p>
         </p:txBody>
       </p:sp>
@@ -3447,17 +3447,17 @@
         </p:nvSpPr>
         <p:spPr>
           <a:xfrm>
-            <a:off x="2286000" y="1508760"/>
-            <a:ext cx="4572000" cy="877824"/>
-          </a:xfrm>
-          <a:prstGeom prst="rect">
-            <a:avLst/>
-          </a:prstGeom>
-          <a:noFill/>
-          <a:ln/>
-        </p:spPr>
-        <p:txBody>
-          <a:bodyPr wrap="square" lIns="0" tIns="76200" rIns="76200" bIns="0" rtlCol="0" anchor="ctr"/>
+            <a:off x="1828800" y="1508760"/>
+            <a:ext cx="5029200" cy="877824"/>
+          </a:xfrm>
+          <a:prstGeom prst="rect">
+            <a:avLst/>
+          </a:prstGeom>
+          <a:noFill/>
+          <a:ln/>
+        </p:spPr>
+        <p:txBody>
+          <a:bodyPr wrap="square" lIns="0" tIns="101600" rIns="101600" bIns="0" rtlCol="0" anchor="ctr"/>
           <a:lstStyle/>
           <a:p>
             <a:pPr indent="0" marL="0">
@@ -3572,7 +3572,7 @@
         <p:spPr>
           <a:xfrm>
             <a:off x="182880" y="2386584"/>
-            <a:ext cx="2103120" cy="877824"/>
+            <a:ext cx="1645920" cy="877824"/>
           </a:xfrm>
           <a:prstGeom prst="rect">
             <a:avLst/>
@@ -3591,7 +3591,7 @@
               <a:buNone/>
             </a:pPr>
             <a:r>
-              <a:rPr lang="en-US" sz="1300" b="1" dirty="0">
+              <a:rPr lang="en-US" sz="1200" b="1" dirty="0">
                 <a:solidFill>
                   <a:srgbClr val="2C5AA0"/>
                 </a:solidFill>
@@ -3601,7 +3601,7 @@
               </a:rPr>
               <a:t>頭蓋内動脈</a:t>
             </a:r>
-            <a:endParaRPr lang="en-US" sz="1300" dirty="0"/>
+            <a:endParaRPr lang="en-US" sz="1200" dirty="0"/>
           </a:p>
         </p:txBody>
       </p:sp>
@@ -3613,17 +3613,17 @@
         </p:nvSpPr>
         <p:spPr>
           <a:xfrm>
-            <a:off x="2286000" y="2386584"/>
-            <a:ext cx="4572000" cy="877824"/>
-          </a:xfrm>
-          <a:prstGeom prst="rect">
-            <a:avLst/>
-          </a:prstGeom>
-          <a:noFill/>
-          <a:ln/>
-        </p:spPr>
-        <p:txBody>
-          <a:bodyPr wrap="square" lIns="0" tIns="76200" rIns="76200" bIns="0" rtlCol="0" anchor="ctr"/>
+            <a:off x="1828800" y="2386584"/>
+            <a:ext cx="5029200" cy="877824"/>
+          </a:xfrm>
+          <a:prstGeom prst="rect">
+            <a:avLst/>
+          </a:prstGeom>
+          <a:noFill/>
+          <a:ln/>
+        </p:spPr>
+        <p:txBody>
+          <a:bodyPr wrap="square" lIns="0" tIns="101600" rIns="101600" bIns="0" rtlCol="0" anchor="ctr"/>
           <a:lstStyle/>
           <a:p>
             <a:pPr indent="0" marL="0">
@@ -3738,7 +3738,7 @@
         <p:spPr>
           <a:xfrm>
             <a:off x="182880" y="3264408"/>
-            <a:ext cx="2103120" cy="877824"/>
+            <a:ext cx="1645920" cy="877824"/>
           </a:xfrm>
           <a:prstGeom prst="rect">
             <a:avLst/>
@@ -3757,7 +3757,7 @@
               <a:buNone/>
             </a:pPr>
             <a:r>
-              <a:rPr lang="en-US" sz="1300" b="1" dirty="0">
+              <a:rPr lang="en-US" sz="1200" b="1" dirty="0">
                 <a:solidFill>
                   <a:srgbClr val="2C5AA0"/>
                 </a:solidFill>
@@ -3767,7 +3767,7 @@
               </a:rPr>
               <a:t>頭部筋肉</a:t>
             </a:r>
-            <a:endParaRPr lang="en-US" sz="1300" dirty="0"/>
+            <a:endParaRPr lang="en-US" sz="1200" dirty="0"/>
           </a:p>
           <a:p>
             <a:pPr algn="ctr" indent="0" marL="0">
@@ -3777,7 +3777,7 @@
               <a:buNone/>
             </a:pPr>
             <a:r>
-              <a:rPr lang="en-US" sz="1300" b="1" dirty="0">
+              <a:rPr lang="en-US" sz="1200" b="1" dirty="0">
                 <a:solidFill>
                   <a:srgbClr val="2C5AA0"/>
                 </a:solidFill>
@@ -3787,7 +3787,7 @@
               </a:rPr>
               <a:t>・頭蓋外筋腱</a:t>
             </a:r>
-            <a:endParaRPr lang="en-US" sz="1300" dirty="0"/>
+            <a:endParaRPr lang="en-US" sz="1200" dirty="0"/>
           </a:p>
         </p:txBody>
       </p:sp>
@@ -3799,17 +3799,17 @@
         </p:nvSpPr>
         <p:spPr>
           <a:xfrm>
-            <a:off x="2286000" y="3264408"/>
-            <a:ext cx="4572000" cy="877824"/>
-          </a:xfrm>
-          <a:prstGeom prst="rect">
-            <a:avLst/>
-          </a:prstGeom>
-          <a:noFill/>
-          <a:ln/>
-        </p:spPr>
-        <p:txBody>
-          <a:bodyPr wrap="square" lIns="0" tIns="76200" rIns="76200" bIns="0" rtlCol="0" anchor="ctr"/>
+            <a:off x="1828800" y="3264408"/>
+            <a:ext cx="5029200" cy="877824"/>
+          </a:xfrm>
+          <a:prstGeom prst="rect">
+            <a:avLst/>
+          </a:prstGeom>
+          <a:noFill/>
+          <a:ln/>
+        </p:spPr>
+        <p:txBody>
+          <a:bodyPr wrap="square" lIns="0" tIns="101600" rIns="101600" bIns="0" rtlCol="0" anchor="ctr"/>
           <a:lstStyle/>
           <a:p>
             <a:pPr indent="0" marL="0">
@@ -3904,7 +3904,7 @@
         <p:spPr>
           <a:xfrm>
             <a:off x="182880" y="4142232"/>
-            <a:ext cx="2103120" cy="877824"/>
+            <a:ext cx="1645920" cy="877824"/>
           </a:xfrm>
           <a:prstGeom prst="rect">
             <a:avLst/>
@@ -3923,7 +3923,7 @@
               <a:buNone/>
             </a:pPr>
             <a:r>
-              <a:rPr lang="en-US" sz="1300" b="1" dirty="0">
+              <a:rPr lang="en-US" sz="1200" b="1" dirty="0">
                 <a:solidFill>
                   <a:srgbClr val="2C5AA0"/>
                 </a:solidFill>
@@ -3933,7 +3933,7 @@
               </a:rPr>
               <a:t>三叉神経</a:t>
             </a:r>
-            <a:endParaRPr lang="en-US" sz="1300" dirty="0"/>
+            <a:endParaRPr lang="en-US" sz="1200" dirty="0"/>
           </a:p>
           <a:p>
             <a:pPr algn="ctr" indent="0" marL="0">
@@ -3943,7 +3943,7 @@
               <a:buNone/>
             </a:pPr>
             <a:r>
-              <a:rPr lang="en-US" sz="1300" b="1" dirty="0">
+              <a:rPr lang="en-US" sz="1200" b="1" dirty="0">
                 <a:solidFill>
                   <a:srgbClr val="2C5AA0"/>
                 </a:solidFill>
@@ -3953,7 +3953,7 @@
               </a:rPr>
               <a:t>・後頭神経</a:t>
             </a:r>
-            <a:endParaRPr lang="en-US" sz="1300" dirty="0"/>
+            <a:endParaRPr lang="en-US" sz="1200" dirty="0"/>
           </a:p>
         </p:txBody>
       </p:sp>
@@ -3965,17 +3965,17 @@
         </p:nvSpPr>
         <p:spPr>
           <a:xfrm>
-            <a:off x="2286000" y="4142232"/>
-            <a:ext cx="4572000" cy="877824"/>
-          </a:xfrm>
-          <a:prstGeom prst="rect">
-            <a:avLst/>
-          </a:prstGeom>
-          <a:noFill/>
-          <a:ln/>
-        </p:spPr>
-        <p:txBody>
-          <a:bodyPr wrap="square" lIns="0" tIns="76200" rIns="76200" bIns="0" rtlCol="0" anchor="ctr"/>
+            <a:off x="1828800" y="4142232"/>
+            <a:ext cx="5029200" cy="877824"/>
+          </a:xfrm>
+          <a:prstGeom prst="rect">
+            <a:avLst/>
+          </a:prstGeom>
+          <a:noFill/>
+          <a:ln/>
+        </p:spPr>
+        <p:txBody>
+          <a:bodyPr wrap="square" lIns="0" tIns="101600" rIns="101600" bIns="0" rtlCol="0" anchor="ctr"/>
           <a:lstStyle/>
           <a:p>
             <a:pPr indent="0" marL="0">
@@ -5151,7 +5151,7 @@
         <p:spPr>
           <a:xfrm>
             <a:off x="274320" y="1920240"/>
-            <a:ext cx="4023360" cy="457200"/>
+            <a:ext cx="4023360" cy="502920"/>
           </a:xfrm>
           <a:prstGeom prst="rect">
             <a:avLst/>
@@ -5171,26 +5171,23 @@
         <p:spPr>
           <a:xfrm>
             <a:off x="274320" y="1920240"/>
-            <a:ext cx="4023360" cy="457200"/>
-          </a:xfrm>
-          <a:prstGeom prst="rect">
-            <a:avLst/>
-          </a:prstGeom>
-          <a:noFill/>
-          <a:ln/>
-        </p:spPr>
-        <p:txBody>
-          <a:bodyPr wrap="square" lIns="0" tIns="0" rIns="0" bIns="0" rtlCol="0" anchor="ctr"/>
+            <a:ext cx="4023360" cy="502920"/>
+          </a:xfrm>
+          <a:prstGeom prst="rect">
+            <a:avLst/>
+          </a:prstGeom>
+          <a:noFill/>
+          <a:ln/>
+        </p:spPr>
+        <p:txBody>
+          <a:bodyPr wrap="square" lIns="0" tIns="50800" rIns="50800" bIns="0" rtlCol="0" anchor="ctr"/>
           <a:lstStyle/>
           <a:p>
             <a:pPr algn="ctr" indent="0" marL="0">
-              <a:lnSpc>
-                <a:spcPct val="100000"/>
-              </a:lnSpc>
-              <a:buNone/>
-            </a:pPr>
-            <a:r>
-              <a:rPr lang="en-US" sz="1400" b="1" dirty="0">
+              <a:buNone/>
+            </a:pPr>
+            <a:r>
+              <a:rPr lang="en-US" sz="1300" b="1" dirty="0">
                 <a:solidFill>
                   <a:srgbClr val="FFFFFF"/>
                 </a:solidFill>
@@ -5198,49 +5195,9 @@
                 <a:ea typeface="BIZ UDPGothic" pitchFamily="34" charset="-122"/>
                 <a:cs typeface="BIZ UDPGothic" pitchFamily="34" charset="-120"/>
               </a:rPr>
-              <a:t>一次・二次</a:t>
-            </a:r>
-            <a:endParaRPr lang="en-US" sz="1400" dirty="0"/>
-          </a:p>
-          <a:p>
-            <a:pPr algn="ctr" indent="0" marL="0">
-              <a:lnSpc>
-                <a:spcPct val="100000"/>
-              </a:lnSpc>
-              <a:buNone/>
-            </a:pPr>
-            <a:r>
-              <a:rPr lang="en-US" sz="1400" b="1" dirty="0">
-                <a:solidFill>
-                  <a:srgbClr val="FFFFFF"/>
-                </a:solidFill>
-                <a:latin typeface="BIZ UDPGothic" pitchFamily="34" charset="0"/>
-                <a:ea typeface="BIZ UDPGothic" pitchFamily="34" charset="-122"/>
-                <a:cs typeface="BIZ UDPGothic" pitchFamily="34" charset="-120"/>
-              </a:rPr>
-              <a:t>体性感覚野</a:t>
-            </a:r>
-            <a:endParaRPr lang="en-US" sz="1400" dirty="0"/>
-          </a:p>
-          <a:p>
-            <a:pPr algn="ctr" indent="0" marL="0">
-              <a:lnSpc>
-                <a:spcPct val="100000"/>
-              </a:lnSpc>
-              <a:buNone/>
-            </a:pPr>
-            <a:r>
-              <a:rPr lang="en-US" sz="1400" b="1" dirty="0">
-                <a:solidFill>
-                  <a:srgbClr val="FFFFFF"/>
-                </a:solidFill>
-                <a:latin typeface="BIZ UDPGothic" pitchFamily="34" charset="0"/>
-                <a:ea typeface="BIZ UDPGothic" pitchFamily="34" charset="-122"/>
-                <a:cs typeface="BIZ UDPGothic" pitchFamily="34" charset="-120"/>
-              </a:rPr>
-              <a:t>S1 / S2</a:t>
-            </a:r>
-            <a:endParaRPr lang="en-US" sz="1400" dirty="0"/>
+              <a:t>一次・二次体性感覚野（S1/S2）</a:t>
+            </a:r>
+            <a:endParaRPr lang="en-US" sz="1300" dirty="0"/>
           </a:p>
         </p:txBody>
       </p:sp>
@@ -5252,8 +5209,8 @@
         </p:nvSpPr>
         <p:spPr>
           <a:xfrm>
-            <a:off x="365760" y="2423160"/>
-            <a:ext cx="3840480" cy="777240"/>
+            <a:off x="365760" y="2468880"/>
+            <a:ext cx="3840480" cy="731520"/>
           </a:xfrm>
           <a:prstGeom prst="rect">
             <a:avLst/>
@@ -5322,7 +5279,7 @@
         <p:spPr>
           <a:xfrm>
             <a:off x="4663440" y="1920240"/>
-            <a:ext cx="4023360" cy="457200"/>
+            <a:ext cx="4023360" cy="502920"/>
           </a:xfrm>
           <a:prstGeom prst="rect">
             <a:avLst/>
@@ -5342,26 +5299,23 @@
         <p:spPr>
           <a:xfrm>
             <a:off x="4663440" y="1920240"/>
-            <a:ext cx="4023360" cy="457200"/>
-          </a:xfrm>
-          <a:prstGeom prst="rect">
-            <a:avLst/>
-          </a:prstGeom>
-          <a:noFill/>
-          <a:ln/>
-        </p:spPr>
-        <p:txBody>
-          <a:bodyPr wrap="square" lIns="0" tIns="0" rIns="0" bIns="0" rtlCol="0" anchor="ctr"/>
+            <a:ext cx="4023360" cy="502920"/>
+          </a:xfrm>
+          <a:prstGeom prst="rect">
+            <a:avLst/>
+          </a:prstGeom>
+          <a:noFill/>
+          <a:ln/>
+        </p:spPr>
+        <p:txBody>
+          <a:bodyPr wrap="square" lIns="0" tIns="50800" rIns="50800" bIns="0" rtlCol="0" anchor="ctr"/>
           <a:lstStyle/>
           <a:p>
             <a:pPr algn="ctr" indent="0" marL="0">
-              <a:lnSpc>
-                <a:spcPct val="100000"/>
-              </a:lnSpc>
-              <a:buNone/>
-            </a:pPr>
-            <a:r>
-              <a:rPr lang="en-US" sz="1400" b="1" dirty="0">
+              <a:buNone/>
+            </a:pPr>
+            <a:r>
+              <a:rPr lang="en-US" sz="1300" b="1" dirty="0">
                 <a:solidFill>
                   <a:srgbClr val="FFFFFF"/>
                 </a:solidFill>
@@ -5369,29 +5323,9 @@
                 <a:ea typeface="BIZ UDPGothic" pitchFamily="34" charset="-122"/>
                 <a:cs typeface="BIZ UDPGothic" pitchFamily="34" charset="-120"/>
               </a:rPr>
-              <a:t>前帯状皮質</a:t>
-            </a:r>
-            <a:endParaRPr lang="en-US" sz="1400" dirty="0"/>
-          </a:p>
-          <a:p>
-            <a:pPr algn="ctr" indent="0" marL="0">
-              <a:lnSpc>
-                <a:spcPct val="100000"/>
-              </a:lnSpc>
-              <a:buNone/>
-            </a:pPr>
-            <a:r>
-              <a:rPr lang="en-US" sz="1400" b="1" dirty="0">
-                <a:solidFill>
-                  <a:srgbClr val="FFFFFF"/>
-                </a:solidFill>
-                <a:latin typeface="BIZ UDPGothic" pitchFamily="34" charset="0"/>
-                <a:ea typeface="BIZ UDPGothic" pitchFamily="34" charset="-122"/>
-                <a:cs typeface="BIZ UDPGothic" pitchFamily="34" charset="-120"/>
-              </a:rPr>
-              <a:t>ACC</a:t>
-            </a:r>
-            <a:endParaRPr lang="en-US" sz="1400" dirty="0"/>
+              <a:t>前帯状皮質（ACC）</a:t>
+            </a:r>
+            <a:endParaRPr lang="en-US" sz="1300" dirty="0"/>
           </a:p>
         </p:txBody>
       </p:sp>
@@ -5403,8 +5337,8 @@
         </p:nvSpPr>
         <p:spPr>
           <a:xfrm>
-            <a:off x="4754880" y="2423160"/>
-            <a:ext cx="3840480" cy="777240"/>
+            <a:off x="4754880" y="2468880"/>
+            <a:ext cx="3840480" cy="731520"/>
           </a:xfrm>
           <a:prstGeom prst="rect">
             <a:avLst/>
@@ -5473,7 +5407,7 @@
         <p:spPr>
           <a:xfrm>
             <a:off x="274320" y="3429000"/>
-            <a:ext cx="4023360" cy="457200"/>
+            <a:ext cx="4023360" cy="502920"/>
           </a:xfrm>
           <a:prstGeom prst="rect">
             <a:avLst/>
@@ -5493,26 +5427,23 @@
         <p:spPr>
           <a:xfrm>
             <a:off x="274320" y="3429000"/>
-            <a:ext cx="4023360" cy="457200"/>
-          </a:xfrm>
-          <a:prstGeom prst="rect">
-            <a:avLst/>
-          </a:prstGeom>
-          <a:noFill/>
-          <a:ln/>
-        </p:spPr>
-        <p:txBody>
-          <a:bodyPr wrap="square" lIns="0" tIns="0" rIns="0" bIns="0" rtlCol="0" anchor="ctr"/>
+            <a:ext cx="4023360" cy="502920"/>
+          </a:xfrm>
+          <a:prstGeom prst="rect">
+            <a:avLst/>
+          </a:prstGeom>
+          <a:noFill/>
+          <a:ln/>
+        </p:spPr>
+        <p:txBody>
+          <a:bodyPr wrap="square" lIns="0" tIns="50800" rIns="50800" bIns="0" rtlCol="0" anchor="ctr"/>
           <a:lstStyle/>
           <a:p>
             <a:pPr algn="ctr" indent="0" marL="0">
-              <a:lnSpc>
-                <a:spcPct val="100000"/>
-              </a:lnSpc>
-              <a:buNone/>
-            </a:pPr>
-            <a:r>
-              <a:rPr lang="en-US" sz="1400" b="1" dirty="0">
+              <a:buNone/>
+            </a:pPr>
+            <a:r>
+              <a:rPr lang="en-US" sz="1300" b="1" dirty="0">
                 <a:solidFill>
                   <a:srgbClr val="FFFFFF"/>
                 </a:solidFill>
@@ -5520,29 +5451,9 @@
                 <a:ea typeface="BIZ UDPGothic" pitchFamily="34" charset="-122"/>
                 <a:cs typeface="BIZ UDPGothic" pitchFamily="34" charset="-120"/>
               </a:rPr>
-              <a:t>島皮質</a:t>
-            </a:r>
-            <a:endParaRPr lang="en-US" sz="1400" dirty="0"/>
-          </a:p>
-          <a:p>
-            <a:pPr algn="ctr" indent="0" marL="0">
-              <a:lnSpc>
-                <a:spcPct val="100000"/>
-              </a:lnSpc>
-              <a:buNone/>
-            </a:pPr>
-            <a:r>
-              <a:rPr lang="en-US" sz="1400" b="1" dirty="0">
-                <a:solidFill>
-                  <a:srgbClr val="FFFFFF"/>
-                </a:solidFill>
-                <a:latin typeface="BIZ UDPGothic" pitchFamily="34" charset="0"/>
-                <a:ea typeface="BIZ UDPGothic" pitchFamily="34" charset="-122"/>
-                <a:cs typeface="BIZ UDPGothic" pitchFamily="34" charset="-120"/>
-              </a:rPr>
-              <a:t>(insula)</a:t>
-            </a:r>
-            <a:endParaRPr lang="en-US" sz="1400" dirty="0"/>
+              <a:t>島皮質（insula）</a:t>
+            </a:r>
+            <a:endParaRPr lang="en-US" sz="1300" dirty="0"/>
           </a:p>
         </p:txBody>
       </p:sp>
@@ -5554,8 +5465,8 @@
         </p:nvSpPr>
         <p:spPr>
           <a:xfrm>
-            <a:off x="365760" y="3931920"/>
-            <a:ext cx="3840480" cy="777240"/>
+            <a:off x="365760" y="3977640"/>
+            <a:ext cx="3840480" cy="731520"/>
           </a:xfrm>
           <a:prstGeom prst="rect">
             <a:avLst/>
@@ -5624,7 +5535,7 @@
         <p:spPr>
           <a:xfrm>
             <a:off x="4663440" y="3429000"/>
-            <a:ext cx="4023360" cy="457200"/>
+            <a:ext cx="4023360" cy="502920"/>
           </a:xfrm>
           <a:prstGeom prst="rect">
             <a:avLst/>
@@ -5644,26 +5555,23 @@
         <p:spPr>
           <a:xfrm>
             <a:off x="4663440" y="3429000"/>
-            <a:ext cx="4023360" cy="457200"/>
-          </a:xfrm>
-          <a:prstGeom prst="rect">
-            <a:avLst/>
-          </a:prstGeom>
-          <a:noFill/>
-          <a:ln/>
-        </p:spPr>
-        <p:txBody>
-          <a:bodyPr wrap="square" lIns="0" tIns="0" rIns="0" bIns="0" rtlCol="0" anchor="ctr"/>
+            <a:ext cx="4023360" cy="502920"/>
+          </a:xfrm>
+          <a:prstGeom prst="rect">
+            <a:avLst/>
+          </a:prstGeom>
+          <a:noFill/>
+          <a:ln/>
+        </p:spPr>
+        <p:txBody>
+          <a:bodyPr wrap="square" lIns="0" tIns="50800" rIns="50800" bIns="0" rtlCol="0" anchor="ctr"/>
           <a:lstStyle/>
           <a:p>
             <a:pPr algn="ctr" indent="0" marL="0">
-              <a:lnSpc>
-                <a:spcPct val="100000"/>
-              </a:lnSpc>
-              <a:buNone/>
-            </a:pPr>
-            <a:r>
-              <a:rPr lang="en-US" sz="1400" b="1" dirty="0">
+              <a:buNone/>
+            </a:pPr>
+            <a:r>
+              <a:rPr lang="en-US" sz="1300" b="1" dirty="0">
                 <a:solidFill>
                   <a:srgbClr val="FFFFFF"/>
                 </a:solidFill>
@@ -5671,29 +5579,9 @@
                 <a:ea typeface="BIZ UDPGothic" pitchFamily="34" charset="-122"/>
                 <a:cs typeface="BIZ UDPGothic" pitchFamily="34" charset="-120"/>
               </a:rPr>
-              <a:t>視床</a:t>
-            </a:r>
-            <a:endParaRPr lang="en-US" sz="1400" dirty="0"/>
-          </a:p>
-          <a:p>
-            <a:pPr algn="ctr" indent="0" marL="0">
-              <a:lnSpc>
-                <a:spcPct val="100000"/>
-              </a:lnSpc>
-              <a:buNone/>
-            </a:pPr>
-            <a:r>
-              <a:rPr lang="en-US" sz="1400" b="1" dirty="0">
-                <a:solidFill>
-                  <a:srgbClr val="FFFFFF"/>
-                </a:solidFill>
-                <a:latin typeface="BIZ UDPGothic" pitchFamily="34" charset="0"/>
-                <a:ea typeface="BIZ UDPGothic" pitchFamily="34" charset="-122"/>
-                <a:cs typeface="BIZ UDPGothic" pitchFamily="34" charset="-120"/>
-              </a:rPr>
-              <a:t>(thalamus)</a:t>
-            </a:r>
-            <a:endParaRPr lang="en-US" sz="1400" dirty="0"/>
+              <a:t>視床（thalamus）</a:t>
+            </a:r>
+            <a:endParaRPr lang="en-US" sz="1300" dirty="0"/>
           </a:p>
         </p:txBody>
       </p:sp>
@@ -5705,8 +5593,8 @@
         </p:nvSpPr>
         <p:spPr>
           <a:xfrm>
-            <a:off x="4754880" y="3931920"/>
-            <a:ext cx="3840480" cy="777240"/>
+            <a:off x="4754880" y="3977640"/>
+            <a:ext cx="3840480" cy="731520"/>
           </a:xfrm>
           <a:prstGeom prst="rect">
             <a:avLst/>
@@ -6002,8 +5890,8 @@
         </p:nvSpPr>
         <p:spPr>
           <a:xfrm>
-            <a:off x="274320" y="2286000"/>
-            <a:ext cx="1920240" cy="1005840"/>
+            <a:off x="182880" y="2286000"/>
+            <a:ext cx="1965960" cy="1005840"/>
           </a:xfrm>
           <a:prstGeom prst="rect">
             <a:avLst/>
@@ -6029,8 +5917,8 @@
         </p:nvSpPr>
         <p:spPr>
           <a:xfrm>
-            <a:off x="274320" y="2286000"/>
-            <a:ext cx="1920240" cy="1005840"/>
+            <a:off x="182880" y="2286000"/>
+            <a:ext cx="1965960" cy="1005840"/>
           </a:xfrm>
           <a:prstGeom prst="rect">
             <a:avLst/>
@@ -6049,7 +5937,7 @@
               <a:buNone/>
             </a:pPr>
             <a:r>
-              <a:rPr lang="en-US" sz="1400" dirty="0">
+              <a:rPr lang="en-US" sz="1300" dirty="0">
                 <a:solidFill>
                   <a:srgbClr val="2D3436"/>
                 </a:solidFill>
@@ -6057,9 +5945,29 @@
                 <a:ea typeface="BIZ UDPGothic" pitchFamily="34" charset="-122"/>
                 <a:cs typeface="BIZ UDPGothic" pitchFamily="34" charset="-120"/>
               </a:rPr>
-              <a:t>片頭痛を繰り返す</a:t>
-            </a:r>
-            <a:endParaRPr lang="en-US" sz="1400" dirty="0"/>
+              <a:t>片頭痛を</a:t>
+            </a:r>
+            <a:endParaRPr lang="en-US" sz="1300" dirty="0"/>
+          </a:p>
+          <a:p>
+            <a:pPr algn="ctr" indent="0" marL="0">
+              <a:lnSpc>
+                <a:spcPct val="115000"/>
+              </a:lnSpc>
+              <a:buNone/>
+            </a:pPr>
+            <a:r>
+              <a:rPr lang="en-US" sz="1300" dirty="0">
+                <a:solidFill>
+                  <a:srgbClr val="2D3436"/>
+                </a:solidFill>
+                <a:latin typeface="BIZ UDPGothic" pitchFamily="34" charset="0"/>
+                <a:ea typeface="BIZ UDPGothic" pitchFamily="34" charset="-122"/>
+                <a:cs typeface="BIZ UDPGothic" pitchFamily="34" charset="-120"/>
+              </a:rPr>
+              <a:t>繰り返す</a:t>
+            </a:r>
+            <a:endParaRPr lang="en-US" sz="1300" dirty="0"/>
           </a:p>
         </p:txBody>
       </p:sp>
@@ -6071,7 +5979,7 @@
         </p:nvSpPr>
         <p:spPr>
           <a:xfrm>
-            <a:off x="2194560" y="2560320"/>
+            <a:off x="2148840" y="2560320"/>
             <a:ext cx="182880" cy="457200"/>
           </a:xfrm>
           <a:prstGeom prst="rect">
@@ -6088,14 +5996,14 @@
               <a:buNone/>
             </a:pPr>
             <a:r>
-              <a:rPr lang="en-US" sz="2200" dirty="0">
+              <a:rPr lang="en-US" sz="2000" dirty="0">
                 <a:solidFill>
                   <a:srgbClr val="4A90D9"/>
                 </a:solidFill>
               </a:rPr>
               <a:t>→</a:t>
             </a:r>
-            <a:endParaRPr lang="en-US" sz="2200" dirty="0"/>
+            <a:endParaRPr lang="en-US" sz="2000" dirty="0"/>
           </a:p>
         </p:txBody>
       </p:sp>
@@ -6107,8 +6015,8 @@
         </p:nvSpPr>
         <p:spPr>
           <a:xfrm>
-            <a:off x="2377440" y="2286000"/>
-            <a:ext cx="1920240" cy="1005840"/>
+            <a:off x="2331720" y="2286000"/>
+            <a:ext cx="1965960" cy="1005840"/>
           </a:xfrm>
           <a:prstGeom prst="rect">
             <a:avLst/>
@@ -6134,8 +6042,8 @@
         </p:nvSpPr>
         <p:spPr>
           <a:xfrm>
-            <a:off x="2377440" y="2286000"/>
-            <a:ext cx="1920240" cy="1005840"/>
+            <a:off x="2331720" y="2286000"/>
+            <a:ext cx="1965960" cy="1005840"/>
           </a:xfrm>
           <a:prstGeom prst="rect">
             <a:avLst/>
@@ -6154,7 +6062,7 @@
               <a:buNone/>
             </a:pPr>
             <a:r>
-              <a:rPr lang="en-US" sz="1400" dirty="0">
+              <a:rPr lang="en-US" sz="1300" dirty="0">
                 <a:solidFill>
                   <a:srgbClr val="2D3436"/>
                 </a:solidFill>
@@ -6162,9 +6070,29 @@
                 <a:ea typeface="BIZ UDPGothic" pitchFamily="34" charset="-122"/>
                 <a:cs typeface="BIZ UDPGothic" pitchFamily="34" charset="-120"/>
               </a:rPr>
-              <a:t>三叉神経系が過敏化</a:t>
-            </a:r>
-            <a:endParaRPr lang="en-US" sz="1400" dirty="0"/>
+              <a:t>三叉神経系が</a:t>
+            </a:r>
+            <a:endParaRPr lang="en-US" sz="1300" dirty="0"/>
+          </a:p>
+          <a:p>
+            <a:pPr algn="ctr" indent="0" marL="0">
+              <a:lnSpc>
+                <a:spcPct val="115000"/>
+              </a:lnSpc>
+              <a:buNone/>
+            </a:pPr>
+            <a:r>
+              <a:rPr lang="en-US" sz="1300" dirty="0">
+                <a:solidFill>
+                  <a:srgbClr val="2D3436"/>
+                </a:solidFill>
+                <a:latin typeface="BIZ UDPGothic" pitchFamily="34" charset="0"/>
+                <a:ea typeface="BIZ UDPGothic" pitchFamily="34" charset="-122"/>
+                <a:cs typeface="BIZ UDPGothic" pitchFamily="34" charset="-120"/>
+              </a:rPr>
+              <a:t>過敏化</a:t>
+            </a:r>
+            <a:endParaRPr lang="en-US" sz="1300" dirty="0"/>
           </a:p>
         </p:txBody>
       </p:sp>
@@ -6193,14 +6121,14 @@
               <a:buNone/>
             </a:pPr>
             <a:r>
-              <a:rPr lang="en-US" sz="2200" dirty="0">
+              <a:rPr lang="en-US" sz="2000" dirty="0">
                 <a:solidFill>
                   <a:srgbClr val="4A90D9"/>
                 </a:solidFill>
               </a:rPr>
               <a:t>→</a:t>
             </a:r>
-            <a:endParaRPr lang="en-US" sz="2200" dirty="0"/>
+            <a:endParaRPr lang="en-US" sz="2000" dirty="0"/>
           </a:p>
         </p:txBody>
       </p:sp>
@@ -6213,7 +6141,7 @@
         <p:spPr>
           <a:xfrm>
             <a:off x="4480560" y="2286000"/>
-            <a:ext cx="1920240" cy="1005840"/>
+            <a:ext cx="1965960" cy="1005840"/>
           </a:xfrm>
           <a:prstGeom prst="rect">
             <a:avLst/>
@@ -6240,7 +6168,7 @@
         <p:spPr>
           <a:xfrm>
             <a:off x="4480560" y="2286000"/>
-            <a:ext cx="1920240" cy="1005840"/>
+            <a:ext cx="1965960" cy="1005840"/>
           </a:xfrm>
           <a:prstGeom prst="rect">
             <a:avLst/>
@@ -6259,7 +6187,7 @@
               <a:buNone/>
             </a:pPr>
             <a:r>
-              <a:rPr lang="en-US" sz="1400" dirty="0">
+              <a:rPr lang="en-US" sz="1300" dirty="0">
                 <a:solidFill>
                   <a:srgbClr val="2D3436"/>
                 </a:solidFill>
@@ -6267,9 +6195,29 @@
                 <a:ea typeface="BIZ UDPGothic" pitchFamily="34" charset="-122"/>
                 <a:cs typeface="BIZ UDPGothic" pitchFamily="34" charset="-120"/>
               </a:rPr>
-              <a:t>頭痛がない日も神経が過活動</a:t>
-            </a:r>
-            <a:endParaRPr lang="en-US" sz="1400" dirty="0"/>
+              <a:t>頭痛がない日も</a:t>
+            </a:r>
+            <a:endParaRPr lang="en-US" sz="1300" dirty="0"/>
+          </a:p>
+          <a:p>
+            <a:pPr algn="ctr" indent="0" marL="0">
+              <a:lnSpc>
+                <a:spcPct val="115000"/>
+              </a:lnSpc>
+              <a:buNone/>
+            </a:pPr>
+            <a:r>
+              <a:rPr lang="en-US" sz="1300" dirty="0">
+                <a:solidFill>
+                  <a:srgbClr val="2D3436"/>
+                </a:solidFill>
+                <a:latin typeface="BIZ UDPGothic" pitchFamily="34" charset="0"/>
+                <a:ea typeface="BIZ UDPGothic" pitchFamily="34" charset="-122"/>
+                <a:cs typeface="BIZ UDPGothic" pitchFamily="34" charset="-120"/>
+              </a:rPr>
+              <a:t>神経が過活動</a:t>
+            </a:r>
+            <a:endParaRPr lang="en-US" sz="1300" dirty="0"/>
           </a:p>
         </p:txBody>
       </p:sp>
@@ -6281,7 +6229,7 @@
         </p:nvSpPr>
         <p:spPr>
           <a:xfrm>
-            <a:off x="6400800" y="2560320"/>
+            <a:off x="6446520" y="2560320"/>
             <a:ext cx="182880" cy="457200"/>
           </a:xfrm>
           <a:prstGeom prst="rect">
@@ -6298,14 +6246,14 @@
               <a:buNone/>
             </a:pPr>
             <a:r>
-              <a:rPr lang="en-US" sz="2200" dirty="0">
+              <a:rPr lang="en-US" sz="2000" dirty="0">
                 <a:solidFill>
                   <a:srgbClr val="4A90D9"/>
                 </a:solidFill>
               </a:rPr>
               <a:t>→</a:t>
             </a:r>
-            <a:endParaRPr lang="en-US" sz="2200" dirty="0"/>
+            <a:endParaRPr lang="en-US" sz="2000" dirty="0"/>
           </a:p>
         </p:txBody>
       </p:sp>
@@ -6317,8 +6265,8 @@
         </p:nvSpPr>
         <p:spPr>
           <a:xfrm>
-            <a:off x="6583680" y="2286000"/>
-            <a:ext cx="1920240" cy="1005840"/>
+            <a:off x="6629400" y="2286000"/>
+            <a:ext cx="1965960" cy="1005840"/>
           </a:xfrm>
           <a:prstGeom prst="rect">
             <a:avLst/>
@@ -6344,8 +6292,8 @@
         </p:nvSpPr>
         <p:spPr>
           <a:xfrm>
-            <a:off x="6583680" y="2286000"/>
-            <a:ext cx="1920240" cy="1005840"/>
+            <a:off x="6629400" y="2286000"/>
+            <a:ext cx="1965960" cy="1005840"/>
           </a:xfrm>
           <a:prstGeom prst="rect">
             <a:avLst/>
@@ -6364,7 +6312,7 @@
               <a:buNone/>
             </a:pPr>
             <a:r>
-              <a:rPr lang="en-US" sz="1400" b="1" dirty="0">
+              <a:rPr lang="en-US" sz="1300" b="1" dirty="0">
                 <a:solidFill>
                   <a:srgbClr val="DC3545"/>
                 </a:solidFill>
@@ -6374,7 +6322,7 @@
               </a:rPr>
               <a:t>慢性片頭痛へ移行</a:t>
             </a:r>
-            <a:endParaRPr lang="en-US" sz="1400" dirty="0"/>
+            <a:endParaRPr lang="en-US" sz="1300" dirty="0"/>
           </a:p>
           <a:p>
             <a:pPr algn="ctr" indent="0" marL="0">
@@ -6384,7 +6332,7 @@
               <a:buNone/>
             </a:pPr>
             <a:r>
-              <a:rPr lang="en-US" sz="1400" b="1" dirty="0">
+              <a:rPr lang="en-US" sz="1300" b="1" dirty="0">
                 <a:solidFill>
                   <a:srgbClr val="DC3545"/>
                 </a:solidFill>
@@ -6392,9 +6340,9 @@
                 <a:ea typeface="BIZ UDPGothic" pitchFamily="34" charset="-122"/>
                 <a:cs typeface="BIZ UDPGothic" pitchFamily="34" charset="-120"/>
               </a:rPr>
-              <a:t>（月15日以上の頭痛）</a:t>
-            </a:r>
-            <a:endParaRPr lang="en-US" sz="1400" dirty="0"/>
+              <a:t>（月15日以上）</a:t>
+            </a:r>
+            <a:endParaRPr lang="en-US" sz="1300" dirty="0"/>
           </a:p>
         </p:txBody>
       </p:sp>
@@ -6950,8 +6898,8 @@
         </p:nvSpPr>
         <p:spPr>
           <a:xfrm>
-            <a:off x="182880" y="1051560"/>
-            <a:ext cx="4206240" cy="1097280"/>
+            <a:off x="137160" y="1051560"/>
+            <a:ext cx="4297680" cy="1097280"/>
           </a:xfrm>
           <a:prstGeom prst="rect">
             <a:avLst/>
@@ -6977,8 +6925,8 @@
         </p:nvSpPr>
         <p:spPr>
           <a:xfrm>
-            <a:off x="182880" y="1051560"/>
-            <a:ext cx="457200" cy="1097280"/>
+            <a:off x="137160" y="1051560"/>
+            <a:ext cx="411480" cy="1097280"/>
           </a:xfrm>
           <a:prstGeom prst="rect">
             <a:avLst/>
@@ -6997,8 +6945,8 @@
         </p:nvSpPr>
         <p:spPr>
           <a:xfrm>
-            <a:off x="182880" y="1051560"/>
-            <a:ext cx="457200" cy="1097280"/>
+            <a:off x="137160" y="1051560"/>
+            <a:ext cx="411480" cy="1097280"/>
           </a:xfrm>
           <a:prstGeom prst="rect">
             <a:avLst/>
@@ -7014,7 +6962,7 @@
               <a:buNone/>
             </a:pPr>
             <a:r>
-              <a:rPr lang="en-US" sz="2600" b="1" dirty="0">
+              <a:rPr lang="en-US" sz="2400" b="1" dirty="0">
                 <a:solidFill>
                   <a:srgbClr val="FFFFFF"/>
                 </a:solidFill>
@@ -7024,7 +6972,7 @@
               </a:rPr>
               <a:t>!</a:t>
             </a:r>
-            <a:endParaRPr lang="en-US" sz="2600" dirty="0"/>
+            <a:endParaRPr lang="en-US" sz="2400" dirty="0"/>
           </a:p>
         </p:txBody>
       </p:sp>
@@ -7036,8 +6984,8 @@
         </p:nvSpPr>
         <p:spPr>
           <a:xfrm>
-            <a:off x="731520" y="1097280"/>
-            <a:ext cx="3520440" cy="640080"/>
+            <a:off x="640080" y="1097280"/>
+            <a:ext cx="3657600" cy="640080"/>
           </a:xfrm>
           <a:prstGeom prst="rect">
             <a:avLst/>
@@ -7056,7 +7004,7 @@
               <a:buNone/>
             </a:pPr>
             <a:r>
-              <a:rPr lang="en-US" sz="1300" b="1" dirty="0">
+              <a:rPr lang="en-US" sz="1200" b="1" dirty="0">
                 <a:solidFill>
                   <a:srgbClr val="2D3436"/>
                 </a:solidFill>
@@ -7066,7 +7014,7 @@
               </a:rPr>
               <a:t>突然始まる激しい頭痛</a:t>
             </a:r>
-            <a:endParaRPr lang="en-US" sz="1300" dirty="0"/>
+            <a:endParaRPr lang="en-US" sz="1200" dirty="0"/>
           </a:p>
           <a:p>
             <a:pPr indent="0" marL="0">
@@ -7076,7 +7024,7 @@
               <a:buNone/>
             </a:pPr>
             <a:r>
-              <a:rPr lang="en-US" sz="1300" b="1" dirty="0">
+              <a:rPr lang="en-US" sz="1200" b="1" dirty="0">
                 <a:solidFill>
                   <a:srgbClr val="2D3436"/>
                 </a:solidFill>
@@ -7086,7 +7034,7 @@
               </a:rPr>
               <a:t>「人生最悪の頭痛」「雷鳴頭痛」</a:t>
             </a:r>
-            <a:endParaRPr lang="en-US" sz="1300" dirty="0"/>
+            <a:endParaRPr lang="en-US" sz="1200" dirty="0"/>
           </a:p>
         </p:txBody>
       </p:sp>
@@ -7098,8 +7046,8 @@
         </p:nvSpPr>
         <p:spPr>
           <a:xfrm>
-            <a:off x="731520" y="1737360"/>
-            <a:ext cx="3520440" cy="347472"/>
+            <a:off x="640080" y="1737360"/>
+            <a:ext cx="3657600" cy="347472"/>
           </a:xfrm>
           <a:prstGeom prst="rect">
             <a:avLst/>
@@ -7115,7 +7063,7 @@
               <a:buNone/>
             </a:pPr>
             <a:r>
-              <a:rPr lang="en-US" sz="1200" dirty="0">
+              <a:rPr lang="en-US" sz="1100" dirty="0">
                 <a:solidFill>
                   <a:srgbClr val="DC3545"/>
                 </a:solidFill>
@@ -7125,7 +7073,7 @@
               </a:rPr>
               <a:t>→ くも膜下出血を疑う</a:t>
             </a:r>
-            <a:endParaRPr lang="en-US" sz="1200" dirty="0"/>
+            <a:endParaRPr lang="en-US" sz="1100" dirty="0"/>
           </a:p>
         </p:txBody>
       </p:sp>
@@ -7138,7 +7086,7 @@
         <p:spPr>
           <a:xfrm>
             <a:off x="4663440" y="1051560"/>
-            <a:ext cx="4206240" cy="1097280"/>
+            <a:ext cx="4297680" cy="1097280"/>
           </a:xfrm>
           <a:prstGeom prst="rect">
             <a:avLst/>
@@ -7165,7 +7113,7 @@
         <p:spPr>
           <a:xfrm>
             <a:off x="4663440" y="1051560"/>
-            <a:ext cx="457200" cy="1097280"/>
+            <a:ext cx="411480" cy="1097280"/>
           </a:xfrm>
           <a:prstGeom prst="rect">
             <a:avLst/>
@@ -7185,7 +7133,7 @@
         <p:spPr>
           <a:xfrm>
             <a:off x="4663440" y="1051560"/>
-            <a:ext cx="457200" cy="1097280"/>
+            <a:ext cx="411480" cy="1097280"/>
           </a:xfrm>
           <a:prstGeom prst="rect">
             <a:avLst/>
@@ -7201,7 +7149,7 @@
               <a:buNone/>
             </a:pPr>
             <a:r>
-              <a:rPr lang="en-US" sz="2600" b="1" dirty="0">
+              <a:rPr lang="en-US" sz="2400" b="1" dirty="0">
                 <a:solidFill>
                   <a:srgbClr val="FFFFFF"/>
                 </a:solidFill>
@@ -7211,7 +7159,7 @@
               </a:rPr>
               <a:t>!</a:t>
             </a:r>
-            <a:endParaRPr lang="en-US" sz="2600" dirty="0"/>
+            <a:endParaRPr lang="en-US" sz="2400" dirty="0"/>
           </a:p>
         </p:txBody>
       </p:sp>
@@ -7223,8 +7171,8 @@
         </p:nvSpPr>
         <p:spPr>
           <a:xfrm>
-            <a:off x="5212080" y="1097280"/>
-            <a:ext cx="3520440" cy="640080"/>
+            <a:off x="5166360" y="1097280"/>
+            <a:ext cx="3657600" cy="640080"/>
           </a:xfrm>
           <a:prstGeom prst="rect">
             <a:avLst/>
@@ -7243,7 +7191,7 @@
               <a:buNone/>
             </a:pPr>
             <a:r>
-              <a:rPr lang="en-US" sz="1300" b="1" dirty="0">
+              <a:rPr lang="en-US" sz="1200" b="1" dirty="0">
                 <a:solidFill>
                   <a:srgbClr val="2D3436"/>
                 </a:solidFill>
@@ -7253,7 +7201,7 @@
               </a:rPr>
               <a:t>発熱・項部硬直・意識障害を伴う</a:t>
             </a:r>
-            <a:endParaRPr lang="en-US" sz="1300" dirty="0"/>
+            <a:endParaRPr lang="en-US" sz="1200" dirty="0"/>
           </a:p>
         </p:txBody>
       </p:sp>
@@ -7265,8 +7213,8 @@
         </p:nvSpPr>
         <p:spPr>
           <a:xfrm>
-            <a:off x="5212080" y="1737360"/>
-            <a:ext cx="3520440" cy="347472"/>
+            <a:off x="5166360" y="1737360"/>
+            <a:ext cx="3657600" cy="347472"/>
           </a:xfrm>
           <a:prstGeom prst="rect">
             <a:avLst/>
@@ -7282,7 +7230,7 @@
               <a:buNone/>
             </a:pPr>
             <a:r>
-              <a:rPr lang="en-US" sz="1200" dirty="0">
+              <a:rPr lang="en-US" sz="1100" dirty="0">
                 <a:solidFill>
                   <a:srgbClr val="DC3545"/>
                 </a:solidFill>
@@ -7292,7 +7240,7 @@
               </a:rPr>
               <a:t>→ 髄膜炎・脳炎を疑う</a:t>
             </a:r>
-            <a:endParaRPr lang="en-US" sz="1200" dirty="0"/>
+            <a:endParaRPr lang="en-US" sz="1100" dirty="0"/>
           </a:p>
         </p:txBody>
       </p:sp>
@@ -7304,8 +7252,8 @@
         </p:nvSpPr>
         <p:spPr>
           <a:xfrm>
-            <a:off x="182880" y="2313432"/>
-            <a:ext cx="4206240" cy="1097280"/>
+            <a:off x="137160" y="2313432"/>
+            <a:ext cx="4297680" cy="1097280"/>
           </a:xfrm>
           <a:prstGeom prst="rect">
             <a:avLst/>
@@ -7331,8 +7279,8 @@
         </p:nvSpPr>
         <p:spPr>
           <a:xfrm>
-            <a:off x="182880" y="2313432"/>
-            <a:ext cx="457200" cy="1097280"/>
+            <a:off x="137160" y="2313432"/>
+            <a:ext cx="411480" cy="1097280"/>
           </a:xfrm>
           <a:prstGeom prst="rect">
             <a:avLst/>
@@ -7351,8 +7299,8 @@
         </p:nvSpPr>
         <p:spPr>
           <a:xfrm>
-            <a:off x="182880" y="2313432"/>
-            <a:ext cx="457200" cy="1097280"/>
+            <a:off x="137160" y="2313432"/>
+            <a:ext cx="411480" cy="1097280"/>
           </a:xfrm>
           <a:prstGeom prst="rect">
             <a:avLst/>
@@ -7368,7 +7316,7 @@
               <a:buNone/>
             </a:pPr>
             <a:r>
-              <a:rPr lang="en-US" sz="2600" b="1" dirty="0">
+              <a:rPr lang="en-US" sz="2400" b="1" dirty="0">
                 <a:solidFill>
                   <a:srgbClr val="FFFFFF"/>
                 </a:solidFill>
@@ -7378,7 +7326,7 @@
               </a:rPr>
               <a:t>!</a:t>
             </a:r>
-            <a:endParaRPr lang="en-US" sz="2600" dirty="0"/>
+            <a:endParaRPr lang="en-US" sz="2400" dirty="0"/>
           </a:p>
         </p:txBody>
       </p:sp>
@@ -7390,8 +7338,8 @@
         </p:nvSpPr>
         <p:spPr>
           <a:xfrm>
-            <a:off x="731520" y="2359152"/>
-            <a:ext cx="3520440" cy="640080"/>
+            <a:off x="640080" y="2359152"/>
+            <a:ext cx="3657600" cy="640080"/>
           </a:xfrm>
           <a:prstGeom prst="rect">
             <a:avLst/>
@@ -7410,7 +7358,7 @@
               <a:buNone/>
             </a:pPr>
             <a:r>
-              <a:rPr lang="en-US" sz="1300" b="1" dirty="0">
+              <a:rPr lang="en-US" sz="1200" b="1" dirty="0">
                 <a:solidFill>
                   <a:srgbClr val="2D3436"/>
                 </a:solidFill>
@@ -7420,7 +7368,7 @@
               </a:rPr>
               <a:t>神経症状を伴う</a:t>
             </a:r>
-            <a:endParaRPr lang="en-US" sz="1300" dirty="0"/>
+            <a:endParaRPr lang="en-US" sz="1200" dirty="0"/>
           </a:p>
           <a:p>
             <a:pPr indent="0" marL="0">
@@ -7430,7 +7378,7 @@
               <a:buNone/>
             </a:pPr>
             <a:r>
-              <a:rPr lang="en-US" sz="1300" b="1" dirty="0">
+              <a:rPr lang="en-US" sz="1200" b="1" dirty="0">
                 <a:solidFill>
                   <a:srgbClr val="2D3436"/>
                 </a:solidFill>
@@ -7440,7 +7388,7 @@
               </a:rPr>
               <a:t>（片麻痺・言語障害・複視・歩行困難）</a:t>
             </a:r>
-            <a:endParaRPr lang="en-US" sz="1300" dirty="0"/>
+            <a:endParaRPr lang="en-US" sz="1200" dirty="0"/>
           </a:p>
         </p:txBody>
       </p:sp>
@@ -7452,8 +7400,8 @@
         </p:nvSpPr>
         <p:spPr>
           <a:xfrm>
-            <a:off x="731520" y="2999232"/>
-            <a:ext cx="3520440" cy="347472"/>
+            <a:off x="640080" y="2999232"/>
+            <a:ext cx="3657600" cy="347472"/>
           </a:xfrm>
           <a:prstGeom prst="rect">
             <a:avLst/>
@@ -7469,7 +7417,7 @@
               <a:buNone/>
             </a:pPr>
             <a:r>
-              <a:rPr lang="en-US" sz="1200" dirty="0">
+              <a:rPr lang="en-US" sz="1100" dirty="0">
                 <a:solidFill>
                   <a:srgbClr val="DC3545"/>
                 </a:solidFill>
@@ -7479,7 +7427,7 @@
               </a:rPr>
               <a:t>→ 脳卒中・脳腫瘍を疑う</a:t>
             </a:r>
-            <a:endParaRPr lang="en-US" sz="1200" dirty="0"/>
+            <a:endParaRPr lang="en-US" sz="1100" dirty="0"/>
           </a:p>
         </p:txBody>
       </p:sp>
@@ -7492,7 +7440,7 @@
         <p:spPr>
           <a:xfrm>
             <a:off x="4663440" y="2313432"/>
-            <a:ext cx="4206240" cy="1097280"/>
+            <a:ext cx="4297680" cy="1097280"/>
           </a:xfrm>
           <a:prstGeom prst="rect">
             <a:avLst/>
@@ -7519,7 +7467,7 @@
         <p:spPr>
           <a:xfrm>
             <a:off x="4663440" y="2313432"/>
-            <a:ext cx="457200" cy="1097280"/>
+            <a:ext cx="411480" cy="1097280"/>
           </a:xfrm>
           <a:prstGeom prst="rect">
             <a:avLst/>
@@ -7539,7 +7487,7 @@
         <p:spPr>
           <a:xfrm>
             <a:off x="4663440" y="2313432"/>
-            <a:ext cx="457200" cy="1097280"/>
+            <a:ext cx="411480" cy="1097280"/>
           </a:xfrm>
           <a:prstGeom prst="rect">
             <a:avLst/>
@@ -7555,7 +7503,7 @@
               <a:buNone/>
             </a:pPr>
             <a:r>
-              <a:rPr lang="en-US" sz="2600" b="1" dirty="0">
+              <a:rPr lang="en-US" sz="2400" b="1" dirty="0">
                 <a:solidFill>
                   <a:srgbClr val="FFFFFF"/>
                 </a:solidFill>
@@ -7565,7 +7513,7 @@
               </a:rPr>
               <a:t>!</a:t>
             </a:r>
-            <a:endParaRPr lang="en-US" sz="2600" dirty="0"/>
+            <a:endParaRPr lang="en-US" sz="2400" dirty="0"/>
           </a:p>
         </p:txBody>
       </p:sp>
@@ -7577,8 +7525,8 @@
         </p:nvSpPr>
         <p:spPr>
           <a:xfrm>
-            <a:off x="5212080" y="2359152"/>
-            <a:ext cx="3520440" cy="640080"/>
+            <a:off x="5166360" y="2359152"/>
+            <a:ext cx="3657600" cy="640080"/>
           </a:xfrm>
           <a:prstGeom prst="rect">
             <a:avLst/>
@@ -7597,7 +7545,7 @@
               <a:buNone/>
             </a:pPr>
             <a:r>
-              <a:rPr lang="en-US" sz="1300" b="1" dirty="0">
+              <a:rPr lang="en-US" sz="1200" b="1" dirty="0">
                 <a:solidFill>
                   <a:srgbClr val="2D3436"/>
                 </a:solidFill>
@@ -7607,7 +7555,7 @@
               </a:rPr>
               <a:t>50歳以降の初めての頭痛</a:t>
             </a:r>
-            <a:endParaRPr lang="en-US" sz="1300" dirty="0"/>
+            <a:endParaRPr lang="en-US" sz="1200" dirty="0"/>
           </a:p>
         </p:txBody>
       </p:sp>
@@ -7619,8 +7567,8 @@
         </p:nvSpPr>
         <p:spPr>
           <a:xfrm>
-            <a:off x="5212080" y="2999232"/>
-            <a:ext cx="3520440" cy="347472"/>
+            <a:off x="5166360" y="2999232"/>
+            <a:ext cx="3657600" cy="347472"/>
           </a:xfrm>
           <a:prstGeom prst="rect">
             <a:avLst/>
@@ -7636,7 +7584,7 @@
               <a:buNone/>
             </a:pPr>
             <a:r>
-              <a:rPr lang="en-US" sz="1200" dirty="0">
+              <a:rPr lang="en-US" sz="1100" dirty="0">
                 <a:solidFill>
                   <a:srgbClr val="DC3545"/>
                 </a:solidFill>
@@ -7646,7 +7594,7 @@
               </a:rPr>
               <a:t>→ 側頭動脈炎・脳腫瘍を疑う</a:t>
             </a:r>
-            <a:endParaRPr lang="en-US" sz="1200" dirty="0"/>
+            <a:endParaRPr lang="en-US" sz="1100" dirty="0"/>
           </a:p>
         </p:txBody>
       </p:sp>
@@ -7658,8 +7606,8 @@
         </p:nvSpPr>
         <p:spPr>
           <a:xfrm>
-            <a:off x="182880" y="3575304"/>
-            <a:ext cx="4206240" cy="1097280"/>
+            <a:off x="137160" y="3575304"/>
+            <a:ext cx="4297680" cy="1097280"/>
           </a:xfrm>
           <a:prstGeom prst="rect">
             <a:avLst/>
@@ -7685,8 +7633,8 @@
         </p:nvSpPr>
         <p:spPr>
           <a:xfrm>
-            <a:off x="182880" y="3575304"/>
-            <a:ext cx="457200" cy="1097280"/>
+            <a:off x="137160" y="3575304"/>
+            <a:ext cx="411480" cy="1097280"/>
           </a:xfrm>
           <a:prstGeom prst="rect">
             <a:avLst/>
@@ -7705,8 +7653,8 @@
         </p:nvSpPr>
         <p:spPr>
           <a:xfrm>
-            <a:off x="182880" y="3575304"/>
-            <a:ext cx="457200" cy="1097280"/>
+            <a:off x="137160" y="3575304"/>
+            <a:ext cx="411480" cy="1097280"/>
           </a:xfrm>
           <a:prstGeom prst="rect">
             <a:avLst/>
@@ -7722,7 +7670,7 @@
               <a:buNone/>
             </a:pPr>
             <a:r>
-              <a:rPr lang="en-US" sz="2600" b="1" dirty="0">
+              <a:rPr lang="en-US" sz="2400" b="1" dirty="0">
                 <a:solidFill>
                   <a:srgbClr val="FFFFFF"/>
                 </a:solidFill>
@@ -7732,7 +7680,7 @@
               </a:rPr>
               <a:t>!</a:t>
             </a:r>
-            <a:endParaRPr lang="en-US" sz="2600" dirty="0"/>
+            <a:endParaRPr lang="en-US" sz="2400" dirty="0"/>
           </a:p>
         </p:txBody>
       </p:sp>
@@ -7744,8 +7692,8 @@
         </p:nvSpPr>
         <p:spPr>
           <a:xfrm>
-            <a:off x="731520" y="3621024"/>
-            <a:ext cx="3520440" cy="640080"/>
+            <a:off x="640080" y="3621024"/>
+            <a:ext cx="3657600" cy="640080"/>
           </a:xfrm>
           <a:prstGeom prst="rect">
             <a:avLst/>
@@ -7764,7 +7712,7 @@
               <a:buNone/>
             </a:pPr>
             <a:r>
-              <a:rPr lang="en-US" sz="1300" b="1" dirty="0">
+              <a:rPr lang="en-US" sz="1200" b="1" dirty="0">
                 <a:solidFill>
                   <a:srgbClr val="2D3436"/>
                 </a:solidFill>
@@ -7774,7 +7722,7 @@
               </a:rPr>
               <a:t>体位で大きく変化する頭痛</a:t>
             </a:r>
-            <a:endParaRPr lang="en-US" sz="1300" dirty="0"/>
+            <a:endParaRPr lang="en-US" sz="1200" dirty="0"/>
           </a:p>
           <a:p>
             <a:pPr indent="0" marL="0">
@@ -7784,7 +7732,7 @@
               <a:buNone/>
             </a:pPr>
             <a:r>
-              <a:rPr lang="en-US" sz="1300" b="1" dirty="0">
+              <a:rPr lang="en-US" sz="1200" b="1" dirty="0">
                 <a:solidFill>
                   <a:srgbClr val="2D3436"/>
                 </a:solidFill>
@@ -7794,7 +7742,7 @@
               </a:rPr>
               <a:t>（起立で悪化、または改善）</a:t>
             </a:r>
-            <a:endParaRPr lang="en-US" sz="1300" dirty="0"/>
+            <a:endParaRPr lang="en-US" sz="1200" dirty="0"/>
           </a:p>
         </p:txBody>
       </p:sp>
@@ -7806,8 +7754,8 @@
         </p:nvSpPr>
         <p:spPr>
           <a:xfrm>
-            <a:off x="731520" y="4261104"/>
-            <a:ext cx="3520440" cy="347472"/>
+            <a:off x="640080" y="4261104"/>
+            <a:ext cx="3657600" cy="347472"/>
           </a:xfrm>
           <a:prstGeom prst="rect">
             <a:avLst/>
@@ -7823,7 +7771,7 @@
               <a:buNone/>
             </a:pPr>
             <a:r>
-              <a:rPr lang="en-US" sz="1200" dirty="0">
+              <a:rPr lang="en-US" sz="1100" dirty="0">
                 <a:solidFill>
                   <a:srgbClr val="DC3545"/>
                 </a:solidFill>
@@ -7831,9 +7779,9 @@
                 <a:ea typeface="BIZ UDPGothic" pitchFamily="34" charset="-122"/>
                 <a:cs typeface="BIZ UDPGothic" pitchFamily="34" charset="-120"/>
               </a:rPr>
-              <a:t>→ 低髄液圧症候群・頭蓋内圧亢進</a:t>
-            </a:r>
-            <a:endParaRPr lang="en-US" sz="1200" dirty="0"/>
+              <a:t>→ 低髄液圧症候群・頭蓋内圧亢進を疑う</a:t>
+            </a:r>
+            <a:endParaRPr lang="en-US" sz="1100" dirty="0"/>
           </a:p>
         </p:txBody>
       </p:sp>
@@ -7846,7 +7794,7 @@
         <p:spPr>
           <a:xfrm>
             <a:off x="4663440" y="3575304"/>
-            <a:ext cx="4206240" cy="1097280"/>
+            <a:ext cx="4297680" cy="1097280"/>
           </a:xfrm>
           <a:prstGeom prst="rect">
             <a:avLst/>
@@ -7873,7 +7821,7 @@
         <p:spPr>
           <a:xfrm>
             <a:off x="4663440" y="3575304"/>
-            <a:ext cx="457200" cy="1097280"/>
+            <a:ext cx="411480" cy="1097280"/>
           </a:xfrm>
           <a:prstGeom prst="rect">
             <a:avLst/>
@@ -7893,7 +7841,7 @@
         <p:spPr>
           <a:xfrm>
             <a:off x="4663440" y="3575304"/>
-            <a:ext cx="457200" cy="1097280"/>
+            <a:ext cx="411480" cy="1097280"/>
           </a:xfrm>
           <a:prstGeom prst="rect">
             <a:avLst/>
@@ -7909,7 +7857,7 @@
               <a:buNone/>
             </a:pPr>
             <a:r>
-              <a:rPr lang="en-US" sz="2600" b="1" dirty="0">
+              <a:rPr lang="en-US" sz="2400" b="1" dirty="0">
                 <a:solidFill>
                   <a:srgbClr val="FFFFFF"/>
                 </a:solidFill>
@@ -7919,7 +7867,7 @@
               </a:rPr>
               <a:t>!</a:t>
             </a:r>
-            <a:endParaRPr lang="en-US" sz="2600" dirty="0"/>
+            <a:endParaRPr lang="en-US" sz="2400" dirty="0"/>
           </a:p>
         </p:txBody>
       </p:sp>
@@ -7931,8 +7879,8 @@
         </p:nvSpPr>
         <p:spPr>
           <a:xfrm>
-            <a:off x="5212080" y="3621024"/>
-            <a:ext cx="3520440" cy="640080"/>
+            <a:off x="5166360" y="3621024"/>
+            <a:ext cx="3657600" cy="640080"/>
           </a:xfrm>
           <a:prstGeom prst="rect">
             <a:avLst/>
@@ -7951,7 +7899,7 @@
               <a:buNone/>
             </a:pPr>
             <a:r>
-              <a:rPr lang="en-US" sz="1300" b="1" dirty="0">
+              <a:rPr lang="en-US" sz="1200" b="1" dirty="0">
                 <a:solidFill>
                   <a:srgbClr val="2D3436"/>
                 </a:solidFill>
@@ -7961,7 +7909,7 @@
               </a:rPr>
               <a:t>免疫不全・がん治療中の頭痛</a:t>
             </a:r>
-            <a:endParaRPr lang="en-US" sz="1300" dirty="0"/>
+            <a:endParaRPr lang="en-US" sz="1200" dirty="0"/>
           </a:p>
         </p:txBody>
       </p:sp>
@@ -7973,8 +7921,8 @@
         </p:nvSpPr>
         <p:spPr>
           <a:xfrm>
-            <a:off x="5212080" y="4261104"/>
-            <a:ext cx="3520440" cy="347472"/>
+            <a:off x="5166360" y="4261104"/>
+            <a:ext cx="3657600" cy="347472"/>
           </a:xfrm>
           <a:prstGeom prst="rect">
             <a:avLst/>
@@ -7990,7 +7938,7 @@
               <a:buNone/>
             </a:pPr>
             <a:r>
-              <a:rPr lang="en-US" sz="1200" dirty="0">
+              <a:rPr lang="en-US" sz="1100" dirty="0">
                 <a:solidFill>
                   <a:srgbClr val="DC3545"/>
                 </a:solidFill>
@@ -8000,7 +7948,7 @@
               </a:rPr>
               <a:t>→ 日和見感染・転移を疑う</a:t>
             </a:r>
-            <a:endParaRPr lang="en-US" sz="1200" dirty="0"/>
+            <a:endParaRPr lang="en-US" sz="1100" dirty="0"/>
           </a:p>
         </p:txBody>
       </p:sp>
@@ -8302,7 +8250,7 @@
               <a:buNone/>
             </a:pPr>
             <a:r>
-              <a:rPr lang="en-US" sz="1400" dirty="0">
+              <a:rPr lang="en-US" sz="1300" dirty="0">
                 <a:solidFill>
                   <a:srgbClr val="E8F0FE"/>
                 </a:solidFill>
@@ -8312,7 +8260,7 @@
               </a:rPr>
               <a:t>脳の実質（灰白質・白質）には侵害受容器がほとんどなく、脳自身は痛みを感じない</a:t>
             </a:r>
-            <a:endParaRPr lang="en-US" sz="1400" dirty="0"/>
+            <a:endParaRPr lang="en-US" sz="1300" dirty="0"/>
           </a:p>
         </p:txBody>
       </p:sp>
@@ -8425,7 +8373,7 @@
               <a:buNone/>
             </a:pPr>
             <a:r>
-              <a:rPr lang="en-US" sz="1400" dirty="0">
+              <a:rPr lang="en-US" sz="1300" dirty="0">
                 <a:solidFill>
                   <a:srgbClr val="E8F0FE"/>
                 </a:solidFill>
@@ -8435,7 +8383,7 @@
               </a:rPr>
               <a:t>頭痛の発生源は「硬膜・頭蓋内血管・頭部筋肉・脳神経」など脳の周辺組織</a:t>
             </a:r>
-            <a:endParaRPr lang="en-US" sz="1400" dirty="0"/>
+            <a:endParaRPr lang="en-US" sz="1300" dirty="0"/>
           </a:p>
         </p:txBody>
       </p:sp>
@@ -8548,7 +8496,7 @@
               <a:buNone/>
             </a:pPr>
             <a:r>
-              <a:rPr lang="en-US" sz="1400" dirty="0">
+              <a:rPr lang="en-US" sz="1300" dirty="0">
                 <a:solidFill>
                   <a:srgbClr val="E8F0FE"/>
                 </a:solidFill>
@@ -8558,7 +8506,7 @@
               </a:rPr>
               <a:t>片頭痛は三叉神経血管反射とCGRPが重要な役割を担う</a:t>
             </a:r>
-            <a:endParaRPr lang="en-US" sz="1400" dirty="0"/>
+            <a:endParaRPr lang="en-US" sz="1300" dirty="0"/>
           </a:p>
         </p:txBody>
       </p:sp>
@@ -8671,7 +8619,7 @@
               <a:buNone/>
             </a:pPr>
             <a:r>
-              <a:rPr lang="en-US" sz="1400" dirty="0">
+              <a:rPr lang="en-US" sz="1300" dirty="0">
                 <a:solidFill>
                   <a:srgbClr val="E8F0FE"/>
                 </a:solidFill>
@@ -8681,7 +8629,7 @@
               </a:rPr>
               <a:t>脳は痛みの「発生源」ではなく、痛みを処理・認識する「司令塔」（ペインマトリクス）</a:t>
             </a:r>
-            <a:endParaRPr lang="en-US" sz="1400" dirty="0"/>
+            <a:endParaRPr lang="en-US" sz="1300" dirty="0"/>
           </a:p>
         </p:txBody>
       </p:sp>
@@ -8794,7 +8742,7 @@
               <a:buNone/>
             </a:pPr>
             <a:r>
-              <a:rPr lang="en-US" sz="1400" dirty="0">
+              <a:rPr lang="en-US" sz="1300" dirty="0">
                 <a:solidFill>
                   <a:srgbClr val="E8F0FE"/>
                 </a:solidFill>
@@ -8804,7 +8752,7 @@
               </a:rPr>
               <a:t>突然の激烈な頭痛・神経症状を伴う頭痛はすぐに救急受診を</a:t>
             </a:r>
-            <a:endParaRPr lang="en-US" sz="1400" dirty="0"/>
+            <a:endParaRPr lang="en-US" sz="1300" dirty="0"/>
           </a:p>
         </p:txBody>
       </p:sp>
